--- a/usecases/uc-06-vm-lifecycle/TCS-Agentic-AI-UC06-VM-Lifecycle.pptx
+++ b/usecases/uc-06-vm-lifecycle/TCS-Agentic-AI-UC06-VM-Lifecycle.pptx
@@ -2746,12 +2746,12 @@
         </p:nvSpPr>
         <p:spPr>
           <a:xfrm>
-            <a:off x="731520" y="4434840"/>
-            <a:ext cx="2011680" cy="1051560"/>
+            <a:off x="731520" y="4160520"/>
+            <a:ext cx="10607040" cy="384048"/>
           </a:xfrm>
           <a:prstGeom prst="roundRect">
             <a:avLst>
-              <a:gd name="adj" fmla="val 5217"/>
+              <a:gd name="adj" fmla="val 11905"/>
             </a:avLst>
           </a:prstGeom>
           <a:solidFill>
@@ -2768,6 +2768,72 @@
       <p:sp>
         <p:nvSpPr>
           <p:cNvPr id="8" name="Text 6"/>
+          <p:cNvSpPr/>
+          <p:nvPr/>
+        </p:nvSpPr>
+        <p:spPr>
+          <a:xfrm>
+            <a:off x="868680" y="4160520"/>
+            <a:ext cx="10332720" cy="384048"/>
+          </a:xfrm>
+          <a:prstGeom prst="rect">
+            <a:avLst/>
+          </a:prstGeom>
+          <a:noFill/>
+          <a:ln/>
+        </p:spPr>
+        <p:txBody>
+          <a:bodyPr wrap="square" rtlCol="0" anchor="ctr"/>
+          <a:lstStyle/>
+          <a:p>
+            <a:pPr indent="0" marL="0">
+              <a:buNone/>
+            </a:pPr>
+            <a:r>
+              <a:rPr lang="en-US" sz="1050" dirty="0">
+                <a:solidFill>
+                  <a:srgbClr val="CBD5E1"/>
+                </a:solidFill>
+                <a:latin typeface="Inter" pitchFamily="34" charset="0"/>
+                <a:ea typeface="Inter" pitchFamily="34" charset="-122"/>
+                <a:cs typeface="Inter" pitchFamily="34" charset="-120"/>
+              </a:rPr>
+              <a:t>SCOPE   ·   VMs BORN on OpenShift Virtualization — requested, provisioned, right-sized, reclaimed.      Machines arriving FROM VMware are UC-10, VM Migration Assurance.</a:t>
+            </a:r>
+            <a:endParaRPr lang="en-US" sz="1050" dirty="0"/>
+          </a:p>
+        </p:txBody>
+      </p:sp>
+      <p:sp>
+        <p:nvSpPr>
+          <p:cNvPr id="9" name="Shape 7"/>
+          <p:cNvSpPr/>
+          <p:nvPr/>
+        </p:nvSpPr>
+        <p:spPr>
+          <a:xfrm>
+            <a:off x="731520" y="4434840"/>
+            <a:ext cx="2011680" cy="1051560"/>
+          </a:xfrm>
+          <a:prstGeom prst="roundRect">
+            <a:avLst>
+              <a:gd name="adj" fmla="val 5217"/>
+            </a:avLst>
+          </a:prstGeom>
+          <a:solidFill>
+            <a:srgbClr val="1E293B"/>
+          </a:solidFill>
+          <a:ln w="12700">
+            <a:solidFill>
+              <a:srgbClr val="334155"/>
+            </a:solidFill>
+            <a:prstDash val="solid"/>
+          </a:ln>
+        </p:spPr>
+      </p:sp>
+      <p:sp>
+        <p:nvSpPr>
+          <p:cNvPr id="10" name="Text 8"/>
           <p:cNvSpPr/>
           <p:nvPr/>
         </p:nvSpPr>
@@ -2806,7 +2872,7 @@
       </p:sp>
       <p:sp>
         <p:nvSpPr>
-          <p:cNvPr id="9" name="Text 7"/>
+          <p:cNvPr id="11" name="Text 9"/>
           <p:cNvSpPr/>
           <p:nvPr/>
         </p:nvSpPr>
@@ -2845,7 +2911,7 @@
       </p:sp>
       <p:sp>
         <p:nvSpPr>
-          <p:cNvPr id="10" name="Shape 8"/>
+          <p:cNvPr id="12" name="Shape 10"/>
           <p:cNvSpPr/>
           <p:nvPr/>
         </p:nvSpPr>
@@ -2872,7 +2938,7 @@
       </p:sp>
       <p:sp>
         <p:nvSpPr>
-          <p:cNvPr id="11" name="Text 9"/>
+          <p:cNvPr id="13" name="Text 11"/>
           <p:cNvSpPr/>
           <p:nvPr/>
         </p:nvSpPr>
@@ -2911,7 +2977,7 @@
       </p:sp>
       <p:sp>
         <p:nvSpPr>
-          <p:cNvPr id="12" name="Text 10"/>
+          <p:cNvPr id="14" name="Text 12"/>
           <p:cNvSpPr/>
           <p:nvPr/>
         </p:nvSpPr>
@@ -2950,7 +3016,7 @@
       </p:sp>
       <p:sp>
         <p:nvSpPr>
-          <p:cNvPr id="13" name="Shape 11"/>
+          <p:cNvPr id="15" name="Shape 13"/>
           <p:cNvSpPr/>
           <p:nvPr/>
         </p:nvSpPr>
@@ -2977,7 +3043,7 @@
       </p:sp>
       <p:sp>
         <p:nvSpPr>
-          <p:cNvPr id="14" name="Text 12"/>
+          <p:cNvPr id="16" name="Text 14"/>
           <p:cNvSpPr/>
           <p:nvPr/>
         </p:nvSpPr>
@@ -3016,7 +3082,7 @@
       </p:sp>
       <p:sp>
         <p:nvSpPr>
-          <p:cNvPr id="15" name="Text 13"/>
+          <p:cNvPr id="17" name="Text 15"/>
           <p:cNvSpPr/>
           <p:nvPr/>
         </p:nvSpPr>
@@ -3055,7 +3121,7 @@
       </p:sp>
       <p:sp>
         <p:nvSpPr>
-          <p:cNvPr id="16" name="Shape 14"/>
+          <p:cNvPr id="18" name="Shape 16"/>
           <p:cNvSpPr/>
           <p:nvPr/>
         </p:nvSpPr>
@@ -3082,7 +3148,7 @@
       </p:sp>
       <p:sp>
         <p:nvSpPr>
-          <p:cNvPr id="17" name="Text 15"/>
+          <p:cNvPr id="19" name="Text 17"/>
           <p:cNvSpPr/>
           <p:nvPr/>
         </p:nvSpPr>
@@ -3121,7 +3187,7 @@
       </p:sp>
       <p:sp>
         <p:nvSpPr>
-          <p:cNvPr id="18" name="Text 16"/>
+          <p:cNvPr id="20" name="Text 18"/>
           <p:cNvSpPr/>
           <p:nvPr/>
         </p:nvSpPr>
@@ -3160,7 +3226,7 @@
       </p:sp>
       <p:sp>
         <p:nvSpPr>
-          <p:cNvPr id="19" name="Shape 17"/>
+          <p:cNvPr id="21" name="Shape 19"/>
           <p:cNvSpPr/>
           <p:nvPr/>
         </p:nvSpPr>
@@ -3187,7 +3253,7 @@
       </p:sp>
       <p:sp>
         <p:nvSpPr>
-          <p:cNvPr id="20" name="Text 18"/>
+          <p:cNvPr id="22" name="Text 20"/>
           <p:cNvSpPr/>
           <p:nvPr/>
         </p:nvSpPr>
@@ -3226,7 +3292,7 @@
       </p:sp>
       <p:sp>
         <p:nvSpPr>
-          <p:cNvPr id="21" name="Text 19"/>
+          <p:cNvPr id="23" name="Text 21"/>
           <p:cNvSpPr/>
           <p:nvPr/>
         </p:nvSpPr>
@@ -3265,7 +3331,7 @@
       </p:sp>
       <p:sp>
         <p:nvSpPr>
-          <p:cNvPr id="22" name="Text 20"/>
+          <p:cNvPr id="24" name="Text 22"/>
           <p:cNvSpPr/>
           <p:nvPr/>
         </p:nvSpPr>
